--- a/LHF_stage_algorithms.pptx
+++ b/LHF_stage_algorithms.pptx
@@ -13,6 +13,7 @@
     <p:sldId id="261" r:id="rId13"/>
     <p:sldId id="262" r:id="rId14"/>
     <p:sldId id="266" r:id="rId18"/>
+    <p:sldId id="270" r:id="rId22"/>
     <p:sldId id="263" r:id="rId15"/>
     <p:sldId id="267" r:id="rId19"/>
     <p:sldId id="268" r:id="rId20"/>
@@ -703,53 +704,60 @@
           <a:lstStyle/>
           <a:p>
             <a:r>
-              <a:t>THIS SLIDE EXISTS BECAUSE OF YOUR ANNOTATION on the two REPET families with suspiciously clean 764/765 bp consensi. Your hypothesis was a palindromic MITE structure that we should tolerate. It was tested and REJECTED — adjacent rm2 hits within 700 bp are 75% SAME strand, only 25% opposite, i.e. below the 50% expected by chance, whereas a palindrome whose consensus captured one arm would show an excess. But the pattern you spotted was real and the cause is more consequential.</a:t>
-            </a:r>
-          </a:p>
-          <a:p>
-            <a:r>
-              <a:t>WHAT IT IS: REPET copies of the 764 bp entry have median length 223 bp — 29% of their own consensus — and their match coordinates cluster into three blocks (starts 2/264/539, ends 262/511/765). 764/3 is about 255, and rm2 and pantera independently call the same element 269 and 264 bp. It is roughly three tandem units collapsed into one library consensus: the consensus-level twin of the runaway merge chain we capped at copy level.</a:t>
-            </a:r>
-          </a:p>
-          <a:p>
-            <a:r>
-              <a:t>WHY IT MATTERS: judged against its own 764 bp consensus, 0.74% of those copies look near-full-length. Against a cross-tool ground truth taken from the independent rm2 consensus, the true figure is 49.5%. That is a 67-fold error, and it would sink every real copy of these families at any near-full-length gate.</a:t>
-            </a:r>
-          </a:p>
-          <a:p>
-            <a:r>
-              <a:t>THE NEGATIVE RESULT IS THE INTERESTING PART. The obvious fix — a sequence-free detector using length commensurability plus phase enrichment — has essentially zero measured sensitivity: 0 of 8 on sequence-verified rm2 over-assemblies. So the earlier claim that 'rm2 shows no over-assemblies' was FALSE; the screen simply cannot see them. What works instead is HAVING THE CLUSTER: compare a member's consensus to the median of its cluster-mates'.</a:t>
-            </a:r>
-          </a:p>
-          <a:p>
-            <a:r>
-              <a:t>THE IMPLEMENTED RULE: if a member's modal consensus is &gt;= 1.8x the median of its mates', substitute the mate length, record cons_len_source = deconvolved, and switch that member to a span-only near-full-length test (its repeat_start/repeat_end live in the collapsed entry's coordinate system, so 'reached both ends' is not a meaningful question about one unit). Deliberately NOT divide-by-k: k is not identified by coordinates, and for 14 of 18 flagged families the consensus was already shorter than their mates', so dividing would have compounded the error up to 5x. And it ABSTAINS when the mates disagree with each other, so inheritance cannot itself inherit an over-assembly.</a:t>
-            </a:r>
-          </a:p>
-          <a:p>
-            <a:r>
-              <a:t>Q: 'Is this a REPET problem?' A: No — and that is the second reason this slide matters. The largest single case in the batch is rm2's rnd-4_family-1870 at 1,992 bp against mates at 322 bp, a 6.19x ratio, moving near-full-length from 0.06% to 29.06% — a 494-fold change. Over-assembly is not a REPET quirk.</a:t>
-            </a:r>
-          </a:p>
-          <a:p>
-            <a:r>
-              <a:t>Q: 'How common is it?' A: Honest answer — unknown per tool. Four REPET entries are confirmed in this assembly; a per-tool RATE requires the libraries, because the only sequence-free screen available does not work. Do not let anyone quote a per-tool rate from this slide.</a:t>
+              <a:t>THIS SLIDE EXISTS BECAUSE OF YOUR ANNOTATION on the two REPET families with suspiciously clean 764/765 bp consensi, and it has now been CORRECTED TWICE — both times by you.</a:t>
             </a:r>
           </a:p>
           <a:p/>
           <a:p>
             <a:r>
-              <a:t>CG COMMENT 1 — 'isn't it a tandem repeat anyway? no overlap with tandem tracks?' MEASURED, and the answer is no. Cluster 1103's 6.87 Mb footprint overlaps fastan by 1.16%, trf by 0.56%, satellome by 0.07% — the gate G4 rejects above 30%, and all 12 built clusters sit between 0.006 and 0.089. So this is an interspersed element that HAPPENS to occur in local tandem arrays (2,892 same-strand runs, mostly of exactly two units), not a satellite. That distinction is exactly why the over-assembly matters: a tandem-array-forming interspersed element is precisely the kind whose library consensus can absorb two or three neighbouring units, and the tandem finders do not flag it because it is not a tandem repeat in their sense.</a:t>
-            </a:r>
-          </a:p>
-          <a:p>
-            <a:r>
-              <a:t>CG COMMENT 2 — first plot is the only self-explanatory one: TO DO. Next iteration splits this slide in two, and leads with a worked single-family example rather than four panels at once.</a:t>
-            </a:r>
-          </a:p>
-          <a:p>
-            <a:r>
-              <a:t>CG COMMENT 3 — libraries before rerun: acknowledged; the re-run is blocked on them and on the ORCID.</a:t>
+              <a:t>FIRST CORRECTION: your palindromic-MITE hypothesis was tested and rejected. Adjacent rm2 hits within 700 bp are 75% SAME strand, only 25% opposite, i.e. below the 50% expected by chance, whereas a palindrome whose consensus captured one arm would show an excess.</a:t>
+            </a:r>
+          </a:p>
+          <a:p/>
+          <a:p>
+            <a:r>
+              <a:t>SECOND CORRECTION (this is the one that matters): I reported the mechanism as ~3 tandem units of a ~255 bp element. That was WRONG, and you caught it by looking at the locus in the genome browser. My analysis had filtered each tool to the single cluster family, so everything those tools call under OTHER family names at the same locus appeared as empty space.</a:t>
+            </a:r>
+          </a:p>
+          <a:p/>
+          <a:p>
+            <a:r>
+              <a:t>WHAT IT ACTUALLY IS: a chimera of two distinct, adjacent elements. The decisive test is co-annotation IDENTITY per consensus block — tandem units of one element must be co-annotated by the SAME family at every block; a chimera by DIFFERENT families. Measured on G1473-Map8: consensus positions 51-484 are co-annotated by rm2 rnd-1_family-608 (a 496 bp consensus) at 55-100% purity, and positions 484-765 by rm2 rnd-1_family-286 (269 bp) at 79-100%. 496 + 269 = 765. The junction falls exactly where the arithmetic predicts. The sister entry G1303-Map20 (764 bp) is the SAME PAIR FUSED IN THE OPPOSITE ORDER, which is why the two entries partition loci almost perfectly instead of double-annotating them.</a:t>
+            </a:r>
+          </a:p>
+          <a:p/>
+          <a:p>
+            <a:r>
+              <a:t>Both halves are real. Element A is confirmed end-to-end by pantera Unknown_390 (497 bp consensus, median copy 482 bp = 97% of it) and rm2 rnd-1_family-608 (median copy 473 bp = 95%). Element B by rm2 286 and pantera Unknown_572 at 83-90%. Neither is a fragment of the other.</a:t>
+            </a:r>
+          </a:p>
+          <a:p/>
+          <a:p>
+            <a:r>
+              <a:t>WHY THE COORDINATE-ONLY DETECTOR WAS FOOLED, and this is worth saying out loud: 496 is approximately 2 x 250, so a chimera whose two parts happen to be ~2x and ~1x a similar length produces endpoint clusters near multiples of ~255 — indistinguishable from a k=3 array by phase enrichment alone. That is a second, independent reason not to trust the phase detector, on top of its measured 0/8 sensitivity.</a:t>
+            </a:r>
+          </a:p>
+          <a:p/>
+          <a:p>
+            <a:r>
+              <a:t>WHAT SURVIVES UNCHANGED: the gate error. Judged against its own 765 bp consensus, 0.74% of those copies look near-full-length; against the cross-tool ground truth, 49.5%. A 67-fold error that would sink every real copy at any completeness gate. And the biggest single case in the batch is still rm2's rnd-4_family-1870 (1,992 bp against mates at 322 bp, 494-fold change), so this is not a REPET quirk.</a:t>
+            </a:r>
+          </a:p>
+          <a:p/>
+          <a:p>
+            <a:r>
+              <a:t>WHAT CHANGES: the deconvolution rule is now known to be COARSE for a chimera rather than exact. Substituting the mate length is still the right action, but it is right only for the part of the family the cluster's mates correspond to. Cluster 1103 holds the B-side mates (264, 269) and not the A-side ones, so REPET copies are judged against ~269 — correct for the B fragments, wrong for the ~21% of G1473-Map8 hits that fall in the A-dominated blocks. That is why cons_len_source is recorded per copy rather than per family.</a:t>
+            </a:r>
+          </a:p>
+          <a:p/>
+          <a:p>
+            <a:r>
+              <a:t>Q: "Should the pipeline split a chimeric family?" A: It cannot, from coordinates — it can only flag it. Splitting needs the library sequence, which is task C1-C3 in the instructions. What the pipeline CAN do today is refuse to treat the fused length as the element length.</a:t>
+            </a:r>
+          </a:p>
+          <a:p>
+            <a:r>
+              <a:t>Q: "How common is it?" A: Honest answer, unknown per tool. Four REPET entries confirmed in this assembly; a per-tool rate needs the libraries.</a:t>
             </a:r>
           </a:p>
         </p:txBody>
@@ -1063,6 +1071,125 @@
           <a:p>
             <a:r>
               <a:t>CG COMMENT — 'very interesting signal, must be dug further and kept for the final presentation': agreed, and it is now a work item. Honest status on whether one genome suffices: at n=24 packets only 6 have |delta| &gt; 20 bp, so the whole 'signal' group is 6 points and the apparent association with a shallow classification path rests on a single cluster. That is an anecdote, not a result. But this genome can supply much more: 763 strict candidates exist and only 12 have been built (1.6%), spread across TIR 261, LTR 220, LINE 190, plus 34 unresolved-ClassII, Helitron 26, PLE 15, DIRS 9, SINE 8. At a measured 17 s per cluster per engine pair, a 200-cluster stratified batch costs about 2 hours single-threaded and would give roughly 50 discordant packets with the classification-path depth known independently. That tests the association WITHOUT any curator verdicts. What one genome cannot do is test whether the relationship generalises across taxa, or calibrate it against actual curator effort — those need more assemblies and the first batch of decisions respectively.</a:t>
+            </a:r>
+          </a:p>
+        </p:txBody>
+      </p:sp>
+      <p:sp>
+        <p:nvSpPr>
+          <p:cNvPr id="4" name="Slide Number Placeholder 3"/>
+          <p:cNvSpPr>
+            <a:spLocks noGrp="1"/>
+          </p:cNvSpPr>
+          <p:nvPr>
+            <p:ph type="sldNum" idx="5" sz="quarter"/>
+          </p:nvPr>
+        </p:nvSpPr>
+        <p:spPr/>
+      </p:sp>
+    </p:spTree>
+  </p:cSld>
+  <p:clrMapOvr>
+    <a:masterClrMapping/>
+  </p:clrMapOvr>
+</p:notes>
+</file>
+
+<file path=ppt/notesSlides/notesSlide15.xml><?xml version="1.0" encoding="utf-8"?>
+<p:notes xmlns:a="http://schemas.openxmlformats.org/drawingml/2006/main" xmlns:p="http://schemas.openxmlformats.org/presentationml/2006/main" xmlns:r="http://schemas.openxmlformats.org/officeDocument/2006/relationships">
+  <p:cSld>
+    <p:spTree>
+      <p:nvGrpSpPr>
+        <p:cNvPr id="1" name=""/>
+        <p:cNvGrpSpPr/>
+        <p:nvPr/>
+      </p:nvGrpSpPr>
+      <p:grpSpPr>
+        <a:xfrm>
+          <a:off x="0" y="0"/>
+          <a:ext cx="0" cy="0"/>
+          <a:chOff x="0" y="0"/>
+          <a:chExt cx="0" cy="0"/>
+        </a:xfrm>
+      </p:grpSpPr>
+      <p:sp>
+        <p:nvSpPr>
+          <p:cNvPr id="2" name="Slide Image Placeholder 1"/>
+          <p:cNvSpPr>
+            <a:spLocks noGrp="1"/>
+          </p:cNvSpPr>
+          <p:nvPr>
+            <p:ph type="sldImg" idx="2"/>
+          </p:nvPr>
+        </p:nvSpPr>
+        <p:spPr/>
+      </p:sp>
+      <p:sp>
+        <p:nvSpPr>
+          <p:cNvPr id="3" name="Notes Placeholder 2"/>
+          <p:cNvSpPr>
+            <a:spLocks noGrp="1"/>
+          </p:cNvSpPr>
+          <p:nvPr>
+            <p:ph type="body" idx="3" sz="quarter"/>
+          </p:nvPr>
+        </p:nvSpPr>
+        <p:spPr/>
+        <p:txBody>
+          <a:bodyPr/>
+          <a:lstStyle/>
+          <a:p>
+            <a:r>
+              <a:t>THIS IS THE "REAL EXAMPLE" YOUR SLIDE-3 AND SLIDE-10 COMMENTS ASKED FOR, and it is also the figure that corrected me. Read it straight off the browser: 949 bp, chr19:25,978,734-25,979,682.</a:t>
+            </a:r>
+          </a:p>
+          <a:p/>
+          <a:p>
+            <a:r>
+              <a:t>WHAT TO POINT AT, in order:</a:t>
+            </a:r>
+          </a:p>
+          <a:p>
+            <a:r>
+              <a:t>1. The REPET lane. ONE copy (hit_id ms119910, two fragments, consensus 2-764 of 765) spans the whole window. Its repeat_left reaches 1 — REPET believes it found a complete, full-length element. This is not a truncated or low-confidence call, which is exactly why no per-tool quality check can catch it.</a:t>
+            </a:r>
+          </a:p>
+          <a:p>
+            <a:r>
+              <a:t>2. The blue block on the left, ~497 bp. Every tool calls it, and pantera calls it Unknown_390 at 1-497 of a 497 bp consensus — 100% of its own length. That is element A, and it is a real, independently confirmed element.</a:t>
+            </a:r>
+          </a:p>
+          <a:p>
+            <a:r>
+              <a:t>3. The orange block on the right, ~270 bp. rm2 calls rnd-1_family-286 at 2-268 of 269 (99%), pantera Unknown_572 at 1-264 of 264 (100%), edta TE_00002952 at 270 bp. That is element B, equally real.</a:t>
+            </a:r>
+          </a:p>
+          <a:p>
+            <a:r>
+              <a:t>4. So REPET's single "full-length copy" is one copy of A plus one copy of B, fused. 496 + 269 = 765.</a:t>
+            </a:r>
+          </a:p>
+          <a:p>
+            <a:r>
+              <a:t>5. The grey blocks are the other families each tool calls in the same window — nested or older insertions (a SINE, a TcMar-Mariner, an L2, an Ngaro LTR at the right edge). They are why my first version of this figure was wrong: I had filtered to the cluster's families, so all of this was blank space and the browser looked nothing like my slide.</a:t>
+            </a:r>
+          </a:p>
+          <a:p/>
+          <a:p>
+            <a:r>
+              <a:t>THE DIVERGENCE DETAIL IS A FREE SECOND SIGNATURE: REPET's two fragments of the same "consensus" carry 1.2% and 7.6% divergence. One real element aging as a unit cannot do that; two independent elements can. Cheap to compute, and it points the same way as the block test.</a:t>
+            </a:r>
+          </a:p>
+          <a:p/>
+          <a:p>
+            <a:r>
+              <a:t>WHY THIS LOCUS AND NOT ANOTHER: it is one of only two places in this cluster where a REPET copy of 600 bp or more contains three or more rm2 hits, i.e. where the fusion is visible in a single screenful. The other (CATOHO010000068.1:22,720-24,345) has an older, more fragmented arrangement.</a:t>
+            </a:r>
+          </a:p>
+          <a:p/>
+          <a:p>
+            <a:r>
+              <a:t>Q: "Is this element a tandem repeat?" A: No, measured — the cluster's 6.87 Mb footprint overlaps fastan 1.16%, trf 0.56%, satellome 0.07%. Note that windowmasker masks the whole window, but windowmasker is excluded from clustering (one name for 4.36 M hits). The two 35 bp fragments in the middle of the window are the tail of one B copy and the head of the next — genuinely adjacent B insertions, which is how a library builder ends up fusing A and B in the first place.</a:t>
             </a:r>
           </a:p>
         </p:txBody>
@@ -5660,6 +5787,118 @@
 </p:sld>
 </file>
 
+<file path=ppt/slides/slide15.xml><?xml version="1.0" encoding="utf-8"?>
+<p:sld xmlns:a="http://schemas.openxmlformats.org/drawingml/2006/main" xmlns:p="http://schemas.openxmlformats.org/presentationml/2006/main" xmlns:r="http://schemas.openxmlformats.org/officeDocument/2006/relationships">
+  <p:cSld>
+    <p:spTree>
+      <p:nvGrpSpPr>
+        <p:cNvPr id="1" name=""/>
+        <p:cNvGrpSpPr/>
+        <p:nvPr/>
+      </p:nvGrpSpPr>
+      <p:grpSpPr/>
+      <p:sp>
+        <p:nvSpPr>
+          <p:cNvPr id="2" name="TextBox 1"/>
+          <p:cNvSpPr txBox="1"/>
+          <p:nvPr/>
+        </p:nvSpPr>
+        <p:spPr>
+          <a:xfrm>
+            <a:off x="411480" y="182880"/>
+            <a:ext cx="11338560" cy="640080"/>
+          </a:xfrm>
+          <a:prstGeom prst="rect">
+            <a:avLst/>
+          </a:prstGeom>
+          <a:noFill/>
+        </p:spPr>
+        <p:txBody>
+          <a:bodyPr wrap="none">
+            <a:spAutoFit/>
+          </a:bodyPr>
+          <a:lstStyle/>
+          <a:p>
+            <a:pPr>
+              <a:defRPr sz="2600" b="1">
+                <a:solidFill>
+                  <a:srgbClr val="274B6D"/>
+                </a:solidFill>
+              </a:defRPr>
+            </a:pPr>
+            <a:r>
+              <a:t>The same locus in the browser — one worked example</a:t>
+            </a:r>
+          </a:p>
+        </p:txBody>
+      </p:sp>
+      <p:sp>
+        <p:nvSpPr>
+          <p:cNvPr id="3" name="TextBox 2"/>
+          <p:cNvSpPr txBox="1"/>
+          <p:nvPr/>
+        </p:nvSpPr>
+        <p:spPr>
+          <a:xfrm>
+            <a:off x="429768" y="804672"/>
+            <a:ext cx="11338560" cy="411480"/>
+          </a:xfrm>
+          <a:prstGeom prst="rect">
+            <a:avLst/>
+          </a:prstGeom>
+          <a:noFill/>
+        </p:spPr>
+        <p:txBody>
+          <a:bodyPr wrap="none">
+            <a:spAutoFit/>
+          </a:bodyPr>
+          <a:lstStyle/>
+          <a:p>
+            <a:pPr>
+              <a:defRPr sz="1350" i="1">
+                <a:solidFill>
+                  <a:srgbClr val="555555"/>
+                </a:solidFill>
+              </a:defRPr>
+            </a:pPr>
+            <a:r>
+              <a:t>OX637613.1:25,978,734-25,979,682  (UCSC chr19, same coordinates) — every family every tool calls here, not just the cluster's</a:t>
+            </a:r>
+          </a:p>
+        </p:txBody>
+      </p:sp>
+      <p:pic>
+        <p:nvPicPr>
+          <p:cNvPr id="4" name="Picture 3" descr="d13_overassembly_locus.png"/>
+          <p:cNvPicPr>
+            <a:picLocks noChangeAspect="1"/>
+          </p:cNvPicPr>
+          <p:nvPr/>
+        </p:nvPicPr>
+        <p:blipFill>
+          <a:blip r:embed="rId2"/>
+          <a:stretch>
+            <a:fillRect/>
+          </a:stretch>
+        </p:blipFill>
+        <p:spPr>
+          <a:xfrm>
+            <a:off x="740908" y="1298448"/>
+            <a:ext cx="10709878" cy="4846320"/>
+          </a:xfrm>
+          <a:prstGeom prst="rect">
+            <a:avLst/>
+          </a:prstGeom>
+        </p:spPr>
+      </p:pic>
+    </p:spTree>
+  </p:cSld>
+  <p:clrMapOvr>
+    <a:masterClrMapping/>
+  </p:clrMapOvr>
+</p:sld>
+</file>
+
 <file path=ppt/slides/slide2.xml><?xml version="1.0" encoding="utf-8"?>
 <p:sld xmlns:a="http://schemas.openxmlformats.org/drawingml/2006/main" xmlns:p="http://schemas.openxmlformats.org/presentationml/2006/main" xmlns:r="http://schemas.openxmlformats.org/officeDocument/2006/relationships">
   <p:cSld>
@@ -6629,7 +6868,7 @@
               </a:defRPr>
             </a:pPr>
             <a:r>
-              <a:t>Your 764/765 bp observation, chased to its conclusion: implemented as overassembly_min_ratio = 1.8</a:t>
+              <a:t>Your 764/765 bp observation, chased to its conclusion: a CHIMERA of two elements (496 + 269), not tandem units</a:t>
             </a:r>
           </a:p>
         </p:txBody>
@@ -6643,7 +6882,7 @@
           <p:nvPr/>
         </p:nvPicPr>
         <p:blipFill>
-          <a:blip r:embed="rId2"/>
+          <a:blip r:embed="rId4"/>
           <a:stretch>
             <a:fillRect/>
           </a:stretch>
